--- a/Docs/kt/Circuvent-KT-Deck.pptx
+++ b/Docs/kt/Circuvent-KT-Deck.pptx
@@ -4717,7 +4717,7 @@
                 </a:solidFill>
                 <a:latin typeface="Calibri"/>
               </a:rPr>
-              <a:t>Generated 15 August 2026 · ba3a4ef</a:t>
+              <a:t>Generated 15 August 2026 · 74ecb95</a:t>
             </a:r>
           </a:p>
         </p:txBody>
@@ -4756,7 +4756,7 @@
                 </a:solidFill>
                 <a:latin typeface="Calibri"/>
               </a:rPr>
-              <a:t>Generated 15 August 2026 from the repository at ba3a4ef · Docs/ is the source of truth</a:t>
+              <a:t>Generated 15 August 2026 from the repository at 74ecb95 · Docs/ is the source of truth</a:t>
             </a:r>
           </a:p>
         </p:txBody>
@@ -10490,7 +10490,7 @@
                 </a:solidFill>
                 <a:latin typeface="Calibri"/>
               </a:rPr>
-              <a:t>23</a:t>
+              <a:t>24</a:t>
             </a:r>
           </a:p>
         </p:txBody>
@@ -10970,7 +10970,7 @@
                 </a:solidFill>
                 <a:latin typeface="Calibri"/>
               </a:rPr>
-              <a:t>185</a:t>
+              <a:t>190</a:t>
             </a:r>
           </a:p>
         </p:txBody>
@@ -14032,7 +14032,7 @@
                 </a:solidFill>
                 <a:latin typeface="Calibri"/>
               </a:rPr>
-              <a:t>23 device types ship from firmware/</a:t>
+              <a:t>24 device types ship from firmware/</a:t>
             </a:r>
           </a:p>
         </p:txBody>
@@ -14690,6 +14690,34 @@
                 <a:latin typeface="Calibri"/>
               </a:rPr>
               <a:t>touchboard</a:t>
+            </a:r>
+          </a:p>
+          <a:p>
+            <a:pPr>
+              <a:lnSpc>
+                <a:spcPct val="125000"/>
+              </a:lnSpc>
+              <a:spcAft>
+                <a:spcPts val="500"/>
+              </a:spcAft>
+            </a:pPr>
+            <a:r>
+              <a:rPr sz="800">
+                <a:solidFill>
+                  <a:srgbClr val="0891B2"/>
+                </a:solidFill>
+                <a:latin typeface="Calibri"/>
+              </a:rPr>
+              <a:t>●  </a:t>
+            </a:r>
+            <a:r>
+              <a:rPr sz="1300">
+                <a:solidFill>
+                  <a:srgbClr val="334155"/>
+                </a:solidFill>
+                <a:latin typeface="Calibri"/>
+              </a:rPr>
+              <a:t>touchboard-8</a:t>
             </a:r>
           </a:p>
           <a:p>

--- a/Docs/kt/Circuvent-KT-Deck.pptx
+++ b/Docs/kt/Circuvent-KT-Deck.pptx
@@ -4717,7 +4717,7 @@
                 </a:solidFill>
                 <a:latin typeface="Calibri"/>
               </a:rPr>
-              <a:t>Generated 15 August 2026 · 74ecb95</a:t>
+              <a:t>Generated 15 August 2026 · 999e5fe</a:t>
             </a:r>
           </a:p>
         </p:txBody>
@@ -4756,7 +4756,7 @@
                 </a:solidFill>
                 <a:latin typeface="Calibri"/>
               </a:rPr>
-              <a:t>Generated 15 August 2026 from the repository at 74ecb95 · Docs/ is the source of truth</a:t>
+              <a:t>Generated 15 August 2026 from the repository at 999e5fe · Docs/ is the source of truth</a:t>
             </a:r>
           </a:p>
         </p:txBody>
